--- a/slides/3-11_local_anesthetics/3-11_local_anesthetics.pptx
+++ b/slides/3-11_local_anesthetics/3-11_local_anesthetics.pptx
@@ -2415,7 +2415,24 @@
                 <a:ea typeface="メイリオ" pitchFamily="34" charset="-122"/>
                 <a:cs typeface="メイリオ" pitchFamily="34" charset="-120"/>
               </a:rPr>
-              <a:t>最大用量</a:t>
+              <a:t>最大</a:t>
+            </a:r>
+            <a:endParaRPr lang="ja-JP" sz="1100" dirty="0"/>
+          </a:p>
+          <a:p>
+            <a:pPr algn="ctr" indent="0" marL="0">
+              <a:buNone/>
+            </a:pPr>
+            <a:r>
+              <a:rPr lang="ja-JP" altLang="en-US" sz="1100" dirty="0">
+                <a:solidFill>
+                  <a:srgbClr val="404040"/>
+                </a:solidFill>
+                <a:latin typeface="メイリオ" pitchFamily="34" charset="0"/>
+                <a:ea typeface="メイリオ" pitchFamily="34" charset="-122"/>
+                <a:cs typeface="メイリオ" pitchFamily="34" charset="-120"/>
+              </a:rPr>
+              <a:t>用量</a:t>
             </a:r>
             <a:endParaRPr lang="ja-JP" sz="1100" dirty="0"/>
           </a:p>
@@ -2593,8 +2610,8 @@
         </p:nvSpPr>
         <p:spPr>
           <a:xfrm>
-            <a:off x="502920" y="2084832"/>
-            <a:ext cx="11155680" cy="3685032"/>
+            <a:off x="502920" y="1691640"/>
+            <a:ext cx="11155680" cy="4480560"/>
           </a:xfrm>
           <a:prstGeom prst="rect">
             <a:avLst/>
@@ -2603,12 +2620,12 @@
           <a:ln/>
         </p:spPr>
         <p:txBody>
-          <a:bodyPr wrap="square" lIns="0" tIns="0" rIns="0" bIns="0" rtlCol="0" anchor="t"/>
+          <a:bodyPr wrap="square" lIns="0" tIns="0" rIns="0" bIns="0" rtlCol="0" anchor="ctr"/>
           <a:lstStyle/>
           <a:p>
             <a:pPr algn="l" marL="406400" indent="-406400">
               <a:spcAft>
-                <a:spcPts val="2000"/>
+                <a:spcPts val="2600"/>
               </a:spcAft>
               <a:buSzPct val="100000"/>
               <a:buChar char="•"/>
@@ -2629,7 +2646,7 @@
           <a:p>
             <a:pPr algn="l" marL="406400" indent="-406400">
               <a:spcAft>
-                <a:spcPts val="2000"/>
+                <a:spcPts val="2600"/>
               </a:spcAft>
               <a:buSzPct val="100000"/>
               <a:buChar char="•"/>
@@ -2650,7 +2667,7 @@
           <a:p>
             <a:pPr algn="l" marL="406400" indent="-406400">
               <a:spcAft>
-                <a:spcPts val="2000"/>
+                <a:spcPts val="2600"/>
               </a:spcAft>
               <a:buSzPct val="100000"/>
               <a:buChar char="•"/>
@@ -2693,7 +2710,7 @@
           <a:p>
             <a:pPr algn="l" marL="406400" indent="-406400">
               <a:spcAft>
-                <a:spcPts val="2000"/>
+                <a:spcPts val="2600"/>
               </a:spcAft>
               <a:buSzPct val="100000"/>
               <a:buChar char="•"/>
@@ -2725,7 +2742,7 @@
           <a:p>
             <a:pPr algn="l" marL="406400" indent="-406400">
               <a:spcAft>
-                <a:spcPts val="2000"/>
+                <a:spcPts val="2600"/>
               </a:spcAft>
               <a:buSzPct val="100000"/>
               <a:buChar char="•"/>
@@ -2986,7 +3003,24 @@
                 <a:ea typeface="メイリオ" pitchFamily="34" charset="-122"/>
                 <a:cs typeface="メイリオ" pitchFamily="34" charset="-120"/>
               </a:rPr>
-              <a:t>最大用量</a:t>
+              <a:t>最大</a:t>
+            </a:r>
+            <a:endParaRPr lang="ja-JP" sz="1100" dirty="0"/>
+          </a:p>
+          <a:p>
+            <a:pPr algn="ctr" indent="0" marL="0">
+              <a:buNone/>
+            </a:pPr>
+            <a:r>
+              <a:rPr lang="ja-JP" altLang="en-US" sz="1100" dirty="0">
+                <a:solidFill>
+                  <a:srgbClr val="404040"/>
+                </a:solidFill>
+                <a:latin typeface="メイリオ" pitchFamily="34" charset="0"/>
+                <a:ea typeface="メイリオ" pitchFamily="34" charset="-122"/>
+                <a:cs typeface="メイリオ" pitchFamily="34" charset="-120"/>
+              </a:rPr>
+              <a:t>用量</a:t>
             </a:r>
             <a:endParaRPr lang="ja-JP" sz="1100" dirty="0"/>
           </a:p>
@@ -3221,6 +3255,98 @@
         </p:nvSpPr>
         <p:spPr>
           <a:xfrm>
+            <a:off x="502920" y="3429000"/>
+            <a:ext cx="3108960" cy="0"/>
+          </a:xfrm>
+          <a:prstGeom prst="line">
+            <a:avLst/>
+          </a:prstGeom>
+          <a:noFill/>
+          <a:ln w="25400">
+            <a:solidFill>
+              <a:srgbClr val="7F7F7F"/>
+            </a:solidFill>
+            <a:prstDash val="solid"/>
+          </a:ln>
+        </p:spPr>
+      </p:sp>
+      <p:sp>
+        <p:nvSpPr>
+          <p:cNvPr id="14" name="Shape 12"/>
+          <p:cNvSpPr/>
+          <p:nvPr/>
+        </p:nvSpPr>
+        <p:spPr>
+          <a:xfrm>
+            <a:off x="5074920" y="3429000"/>
+            <a:ext cx="457200" cy="0"/>
+          </a:xfrm>
+          <a:prstGeom prst="line">
+            <a:avLst/>
+          </a:prstGeom>
+          <a:noFill/>
+          <a:ln w="25400">
+            <a:solidFill>
+              <a:srgbClr val="7F7F7F"/>
+            </a:solidFill>
+            <a:prstDash val="solid"/>
+          </a:ln>
+        </p:spPr>
+      </p:sp>
+      <p:sp>
+        <p:nvSpPr>
+          <p:cNvPr id="15" name="Shape 13"/>
+          <p:cNvSpPr/>
+          <p:nvPr/>
+        </p:nvSpPr>
+        <p:spPr>
+          <a:xfrm>
+            <a:off x="502920" y="4069080"/>
+            <a:ext cx="3108960" cy="0"/>
+          </a:xfrm>
+          <a:prstGeom prst="line">
+            <a:avLst/>
+          </a:prstGeom>
+          <a:noFill/>
+          <a:ln w="25400">
+            <a:solidFill>
+              <a:srgbClr val="7F7F7F"/>
+            </a:solidFill>
+            <a:prstDash val="solid"/>
+          </a:ln>
+        </p:spPr>
+      </p:sp>
+      <p:sp>
+        <p:nvSpPr>
+          <p:cNvPr id="16" name="Shape 14"/>
+          <p:cNvSpPr/>
+          <p:nvPr/>
+        </p:nvSpPr>
+        <p:spPr>
+          <a:xfrm>
+            <a:off x="5074920" y="4069080"/>
+            <a:ext cx="457200" cy="0"/>
+          </a:xfrm>
+          <a:prstGeom prst="line">
+            <a:avLst/>
+          </a:prstGeom>
+          <a:noFill/>
+          <a:ln w="25400">
+            <a:solidFill>
+              <a:srgbClr val="7F7F7F"/>
+            </a:solidFill>
+            <a:prstDash val="solid"/>
+          </a:ln>
+        </p:spPr>
+      </p:sp>
+      <p:sp>
+        <p:nvSpPr>
+          <p:cNvPr id="17" name="Shape 15"/>
+          <p:cNvSpPr/>
+          <p:nvPr/>
+        </p:nvSpPr>
+        <p:spPr>
+          <a:xfrm>
             <a:off x="3611880" y="3200400"/>
             <a:ext cx="502920" cy="1097280"/>
           </a:xfrm>
@@ -3237,7 +3363,7 @@
       </p:sp>
       <p:sp>
         <p:nvSpPr>
-          <p:cNvPr id="14" name="Shape 12"/>
+          <p:cNvPr id="18" name="Shape 16"/>
           <p:cNvSpPr/>
           <p:nvPr/>
         </p:nvSpPr>
@@ -3259,7 +3385,7 @@
       </p:sp>
       <p:sp>
         <p:nvSpPr>
-          <p:cNvPr id="15" name="Shape 13"/>
+          <p:cNvPr id="19" name="Shape 17"/>
           <p:cNvSpPr/>
           <p:nvPr/>
         </p:nvSpPr>
@@ -3284,7 +3410,7 @@
       </p:sp>
       <p:sp>
         <p:nvSpPr>
-          <p:cNvPr id="16" name="Shape 14"/>
+          <p:cNvPr id="20" name="Shape 18"/>
           <p:cNvSpPr/>
           <p:nvPr/>
         </p:nvSpPr>
@@ -3307,7 +3433,7 @@
       </p:sp>
       <p:sp>
         <p:nvSpPr>
-          <p:cNvPr id="17" name="Shape 15"/>
+          <p:cNvPr id="21" name="Shape 19"/>
           <p:cNvSpPr/>
           <p:nvPr/>
         </p:nvSpPr>
@@ -3350,7 +3476,7 @@
       </p:sp>
       <p:sp>
         <p:nvSpPr>
-          <p:cNvPr id="18" name="Shape 16"/>
+          <p:cNvPr id="22" name="Shape 20"/>
           <p:cNvSpPr/>
           <p:nvPr/>
         </p:nvSpPr>
@@ -3370,7 +3496,7 @@
       </p:sp>
       <p:sp>
         <p:nvSpPr>
-          <p:cNvPr id="19" name="Shape 17"/>
+          <p:cNvPr id="23" name="Shape 21"/>
           <p:cNvSpPr/>
           <p:nvPr/>
         </p:nvSpPr>
@@ -3410,7 +3536,7 @@
       </p:sp>
       <p:sp>
         <p:nvSpPr>
-          <p:cNvPr id="20" name="Shape 18"/>
+          <p:cNvPr id="24" name="Shape 22"/>
           <p:cNvSpPr/>
           <p:nvPr/>
         </p:nvSpPr>
@@ -3453,7 +3579,7 @@
       </p:sp>
       <p:sp>
         <p:nvSpPr>
-          <p:cNvPr id="21" name="Shape 19"/>
+          <p:cNvPr id="25" name="Shape 23"/>
           <p:cNvSpPr/>
           <p:nvPr/>
         </p:nvSpPr>
@@ -3473,7 +3599,7 @@
       </p:sp>
       <p:sp>
         <p:nvSpPr>
-          <p:cNvPr id="22" name="Text 20"/>
+          <p:cNvPr id="26" name="Text 24"/>
           <p:cNvSpPr txBox="1"/>
           <p:nvPr/>
         </p:nvSpPr>
@@ -3512,7 +3638,7 @@
       </p:sp>
       <p:sp>
         <p:nvSpPr>
-          <p:cNvPr id="23" name="Text 21"/>
+          <p:cNvPr id="27" name="Text 25"/>
           <p:cNvSpPr txBox="1"/>
           <p:nvPr/>
         </p:nvSpPr>
@@ -3551,7 +3677,7 @@
       </p:sp>
       <p:sp>
         <p:nvSpPr>
-          <p:cNvPr id="24" name="Text 22"/>
+          <p:cNvPr id="28" name="Text 26"/>
           <p:cNvSpPr txBox="1"/>
           <p:nvPr/>
         </p:nvSpPr>
@@ -3590,7 +3716,7 @@
       </p:sp>
       <p:sp>
         <p:nvSpPr>
-          <p:cNvPr id="25" name="Text 23"/>
+          <p:cNvPr id="29" name="Text 27"/>
           <p:cNvSpPr txBox="1"/>
           <p:nvPr/>
         </p:nvSpPr>
@@ -3629,7 +3755,7 @@
       </p:sp>
       <p:sp>
         <p:nvSpPr>
-          <p:cNvPr id="26" name="Text 24"/>
+          <p:cNvPr id="30" name="Text 28"/>
           <p:cNvSpPr txBox="1"/>
           <p:nvPr/>
         </p:nvSpPr>
@@ -3668,7 +3794,7 @@
       </p:sp>
       <p:sp>
         <p:nvSpPr>
-          <p:cNvPr id="27" name="Text 25"/>
+          <p:cNvPr id="31" name="Text 29"/>
           <p:cNvSpPr txBox="1"/>
           <p:nvPr/>
         </p:nvSpPr>
@@ -3707,7 +3833,7 @@
       </p:sp>
       <p:sp>
         <p:nvSpPr>
-          <p:cNvPr id="28" name="Text 26"/>
+          <p:cNvPr id="32" name="Text 30"/>
           <p:cNvSpPr txBox="1"/>
           <p:nvPr/>
         </p:nvSpPr>
@@ -3763,7 +3889,7 @@
       </p:sp>
       <p:sp>
         <p:nvSpPr>
-          <p:cNvPr id="29" name="Text 27"/>
+          <p:cNvPr id="33" name="Text 31"/>
           <p:cNvSpPr txBox="1"/>
           <p:nvPr/>
         </p:nvSpPr>
@@ -3802,7 +3928,7 @@
       </p:sp>
       <p:sp>
         <p:nvSpPr>
-          <p:cNvPr id="30" name="Text 28"/>
+          <p:cNvPr id="34" name="Text 32"/>
           <p:cNvSpPr txBox="1"/>
           <p:nvPr/>
         </p:nvSpPr>
@@ -3858,7 +3984,7 @@
       </p:sp>
       <p:sp>
         <p:nvSpPr>
-          <p:cNvPr id="31" name="Text 29"/>
+          <p:cNvPr id="35" name="Text 33"/>
           <p:cNvSpPr txBox="1"/>
           <p:nvPr/>
         </p:nvSpPr>
@@ -3897,7 +4023,7 @@
       </p:sp>
       <p:sp>
         <p:nvSpPr>
-          <p:cNvPr id="32" name="Text 30"/>
+          <p:cNvPr id="36" name="Text 34"/>
           <p:cNvSpPr txBox="1"/>
           <p:nvPr/>
         </p:nvSpPr>
@@ -4153,7 +4279,24 @@
                 <a:ea typeface="メイリオ" pitchFamily="34" charset="-122"/>
                 <a:cs typeface="メイリオ" pitchFamily="34" charset="-120"/>
               </a:rPr>
-              <a:t>最大用量</a:t>
+              <a:t>最大</a:t>
+            </a:r>
+            <a:endParaRPr lang="ja-JP" sz="1100" dirty="0"/>
+          </a:p>
+          <a:p>
+            <a:pPr algn="ctr" indent="0" marL="0">
+              <a:buNone/>
+            </a:pPr>
+            <a:r>
+              <a:rPr lang="ja-JP" altLang="en-US" sz="1100" dirty="0">
+                <a:solidFill>
+                  <a:srgbClr val="404040"/>
+                </a:solidFill>
+                <a:latin typeface="メイリオ" pitchFamily="34" charset="0"/>
+                <a:ea typeface="メイリオ" pitchFamily="34" charset="-122"/>
+                <a:cs typeface="メイリオ" pitchFamily="34" charset="-120"/>
+              </a:rPr>
+              <a:t>用量</a:t>
             </a:r>
             <a:endParaRPr lang="ja-JP" sz="1100" dirty="0"/>
           </a:p>
@@ -4357,9 +4500,14 @@
             </a:avLst>
           </a:prstGeom>
           <a:solidFill>
-            <a:srgbClr val="F2F2F2"/>
+            <a:srgbClr val="FFFFFF"/>
           </a:solidFill>
-          <a:ln/>
+          <a:ln w="31750">
+            <a:solidFill>
+              <a:srgbClr val="0072B2"/>
+            </a:solidFill>
+            <a:prstDash val="solid"/>
+          </a:ln>
         </p:spPr>
       </p:sp>
       <p:sp>
@@ -4389,7 +4537,7 @@
             <a:r>
               <a:rPr lang="ja-JP" altLang="en-US" sz="2600" b="1" dirty="0">
                 <a:solidFill>
-                  <a:srgbClr val="0072B2"/>
+                  <a:srgbClr val="262626"/>
                 </a:solidFill>
                 <a:latin typeface="メイリオ" pitchFamily="34" charset="0"/>
                 <a:ea typeface="メイリオ" pitchFamily="34" charset="-122"/>
@@ -4448,7 +4596,7 @@
         </p:nvSpPr>
         <p:spPr>
           <a:xfrm>
-            <a:off x="667512" y="3666744"/>
+            <a:off x="667512" y="3895344"/>
             <a:ext cx="3236976" cy="457200"/>
           </a:xfrm>
           <a:prstGeom prst="rect">
@@ -4487,7 +4635,7 @@
         </p:nvSpPr>
         <p:spPr>
           <a:xfrm>
-            <a:off x="667512" y="4325112"/>
+            <a:off x="667512" y="4782312"/>
             <a:ext cx="3236976" cy="457200"/>
           </a:xfrm>
           <a:prstGeom prst="rect">
@@ -4526,7 +4674,7 @@
         </p:nvSpPr>
         <p:spPr>
           <a:xfrm>
-            <a:off x="4311396" y="2194560"/>
+            <a:off x="4306824" y="2194560"/>
             <a:ext cx="3566160" cy="3209544"/>
           </a:xfrm>
           <a:prstGeom prst="roundRect">
@@ -4535,9 +4683,14 @@
             </a:avLst>
           </a:prstGeom>
           <a:solidFill>
-            <a:srgbClr val="F2F2F2"/>
+            <a:srgbClr val="FFFFFF"/>
           </a:solidFill>
-          <a:ln/>
+          <a:ln w="31750">
+            <a:solidFill>
+              <a:srgbClr val="D55E00"/>
+            </a:solidFill>
+            <a:prstDash val="solid"/>
+          </a:ln>
         </p:spPr>
       </p:sp>
       <p:sp>
@@ -4548,7 +4701,7 @@
         </p:nvSpPr>
         <p:spPr>
           <a:xfrm>
-            <a:off x="4475988" y="2359152"/>
+            <a:off x="4471416" y="2359152"/>
             <a:ext cx="3236976" cy="502920"/>
           </a:xfrm>
           <a:prstGeom prst="rect">
@@ -4567,7 +4720,7 @@
             <a:r>
               <a:rPr lang="ja-JP" altLang="en-US" sz="2600" b="1" dirty="0">
                 <a:solidFill>
-                  <a:srgbClr val="D55E00"/>
+                  <a:srgbClr val="262626"/>
                 </a:solidFill>
                 <a:latin typeface="メイリオ" pitchFamily="34" charset="0"/>
                 <a:ea typeface="メイリオ" pitchFamily="34" charset="-122"/>
@@ -4587,7 +4740,7 @@
         </p:nvSpPr>
         <p:spPr>
           <a:xfrm>
-            <a:off x="4475988" y="3008376"/>
+            <a:off x="4471416" y="3008376"/>
             <a:ext cx="3236976" cy="457200"/>
           </a:xfrm>
           <a:prstGeom prst="rect">
@@ -4626,7 +4779,7 @@
         </p:nvSpPr>
         <p:spPr>
           <a:xfrm>
-            <a:off x="4475988" y="3666744"/>
+            <a:off x="4471416" y="3666744"/>
             <a:ext cx="3236976" cy="914400"/>
           </a:xfrm>
           <a:prstGeom prst="rect">
@@ -4682,7 +4835,7 @@
         </p:nvSpPr>
         <p:spPr>
           <a:xfrm>
-            <a:off x="4475988" y="4782312"/>
+            <a:off x="4471416" y="4782312"/>
             <a:ext cx="3236976" cy="457200"/>
           </a:xfrm>
           <a:prstGeom prst="rect">
@@ -4730,9 +4883,14 @@
             </a:avLst>
           </a:prstGeom>
           <a:solidFill>
-            <a:srgbClr val="F2F2F2"/>
+            <a:srgbClr val="FFFFFF"/>
           </a:solidFill>
-          <a:ln/>
+          <a:ln w="31750">
+            <a:solidFill>
+              <a:srgbClr val="00A8AA"/>
+            </a:solidFill>
+            <a:prstDash val="solid"/>
+          </a:ln>
         </p:spPr>
       </p:sp>
       <p:sp>
@@ -4762,7 +4920,7 @@
             <a:r>
               <a:rPr lang="ja-JP" altLang="en-US" sz="2600" b="1" dirty="0">
                 <a:solidFill>
-                  <a:srgbClr val="00A8AA"/>
+                  <a:srgbClr val="262626"/>
                 </a:solidFill>
                 <a:latin typeface="メイリオ" pitchFamily="34" charset="0"/>
                 <a:ea typeface="メイリオ" pitchFamily="34" charset="-122"/>
@@ -4821,7 +4979,7 @@
         </p:nvSpPr>
         <p:spPr>
           <a:xfrm>
-            <a:off x="8284464" y="3666744"/>
+            <a:off x="8284464" y="3895344"/>
             <a:ext cx="3236976" cy="457200"/>
           </a:xfrm>
           <a:prstGeom prst="rect">
@@ -4860,7 +5018,7 @@
         </p:nvSpPr>
         <p:spPr>
           <a:xfrm>
-            <a:off x="8284464" y="4325112"/>
+            <a:off x="8284464" y="4782312"/>
             <a:ext cx="3236976" cy="457200"/>
           </a:xfrm>
           <a:prstGeom prst="rect">
@@ -5110,7 +5268,24 @@
                 <a:ea typeface="メイリオ" pitchFamily="34" charset="-122"/>
                 <a:cs typeface="メイリオ" pitchFamily="34" charset="-120"/>
               </a:rPr>
-              <a:t>最大用量</a:t>
+              <a:t>最大</a:t>
+            </a:r>
+            <a:endParaRPr lang="ja-JP" sz="1100" dirty="0"/>
+          </a:p>
+          <a:p>
+            <a:pPr algn="ctr" indent="0" marL="0">
+              <a:buNone/>
+            </a:pPr>
+            <a:r>
+              <a:rPr lang="ja-JP" altLang="en-US" sz="1100" dirty="0">
+                <a:solidFill>
+                  <a:srgbClr val="404040"/>
+                </a:solidFill>
+                <a:latin typeface="メイリオ" pitchFamily="34" charset="0"/>
+                <a:ea typeface="メイリオ" pitchFamily="34" charset="-122"/>
+                <a:cs typeface="メイリオ" pitchFamily="34" charset="-120"/>
+              </a:rPr>
+              <a:t>用量</a:t>
             </a:r>
             <a:endParaRPr lang="ja-JP" sz="1100" dirty="0"/>
           </a:p>
@@ -5331,7 +5506,7 @@
                     <a:bodyPr/>
                     <a:lstStyle/>
                     <a:p>
-                      <a:pPr algn="ctr" indent="0" marL="0">
+                      <a:pPr algn="l" indent="0" marL="0">
                         <a:lnSpc>
                           <a:spcPts val="2640"/>
                         </a:lnSpc>
@@ -5402,7 +5577,7 @@
                     <a:bodyPr/>
                     <a:lstStyle/>
                     <a:p>
-                      <a:pPr algn="ctr" indent="0" marL="0">
+                      <a:pPr algn="l" indent="0" marL="0">
                         <a:lnSpc>
                           <a:spcPts val="2640"/>
                         </a:lnSpc>
@@ -5473,7 +5648,7 @@
                     <a:bodyPr/>
                     <a:lstStyle/>
                     <a:p>
-                      <a:pPr algn="ctr" indent="0" marL="0">
+                      <a:pPr algn="l" indent="0" marL="0">
                         <a:lnSpc>
                           <a:spcPts val="2640"/>
                         </a:lnSpc>
@@ -5544,7 +5719,7 @@
                     <a:bodyPr/>
                     <a:lstStyle/>
                     <a:p>
-                      <a:pPr algn="ctr" indent="0" marL="0">
+                      <a:pPr algn="l" indent="0" marL="0">
                         <a:lnSpc>
                           <a:spcPts val="2640"/>
                         </a:lnSpc>
@@ -7396,7 +7571,24 @@
                 <a:ea typeface="メイリオ" pitchFamily="34" charset="-122"/>
                 <a:cs typeface="メイリオ" pitchFamily="34" charset="-120"/>
               </a:rPr>
-              <a:t>最大用量</a:t>
+              <a:t>最大</a:t>
+            </a:r>
+            <a:endParaRPr lang="ja-JP" sz="1100" dirty="0"/>
+          </a:p>
+          <a:p>
+            <a:pPr algn="ctr" indent="0" marL="0">
+              <a:buNone/>
+            </a:pPr>
+            <a:r>
+              <a:rPr lang="ja-JP" altLang="en-US" sz="1100" b="1" dirty="0">
+                <a:solidFill>
+                  <a:srgbClr val="FFFFFF"/>
+                </a:solidFill>
+                <a:latin typeface="メイリオ" pitchFamily="34" charset="0"/>
+                <a:ea typeface="メイリオ" pitchFamily="34" charset="-122"/>
+                <a:cs typeface="メイリオ" pitchFamily="34" charset="-120"/>
+              </a:rPr>
+              <a:t>用量</a:t>
             </a:r>
             <a:endParaRPr lang="ja-JP" sz="1100" dirty="0"/>
           </a:p>
@@ -7616,7 +7808,7 @@
                     <a:bodyPr/>
                     <a:lstStyle/>
                     <a:p>
-                      <a:pPr algn="ctr" indent="0" marL="0">
+                      <a:pPr algn="l" indent="0" marL="0">
                         <a:lnSpc>
                           <a:spcPts val="2640"/>
                         </a:lnSpc>
@@ -7687,7 +7879,7 @@
                     <a:bodyPr/>
                     <a:lstStyle/>
                     <a:p>
-                      <a:pPr algn="ctr" indent="0" marL="0">
+                      <a:pPr algn="l" indent="0" marL="0">
                         <a:lnSpc>
                           <a:spcPts val="2640"/>
                         </a:lnSpc>
@@ -7711,7 +7903,7 @@
                       </a:endParaRPr>
                     </a:p>
                     <a:p>
-                      <a:pPr algn="ctr" indent="0" marL="0">
+                      <a:pPr algn="l" indent="0" marL="0">
                         <a:lnSpc>
                           <a:spcPts val="2640"/>
                         </a:lnSpc>
@@ -7782,7 +7974,7 @@
                     <a:bodyPr/>
                     <a:lstStyle/>
                     <a:p>
-                      <a:pPr algn="ctr" indent="0" marL="0">
+                      <a:pPr algn="l" indent="0" marL="0">
                         <a:lnSpc>
                           <a:spcPts val="2640"/>
                         </a:lnSpc>
@@ -9198,7 +9390,24 @@
                 <a:ea typeface="メイリオ" pitchFamily="34" charset="-122"/>
                 <a:cs typeface="メイリオ" pitchFamily="34" charset="-120"/>
               </a:rPr>
-              <a:t>最大用量</a:t>
+              <a:t>最大</a:t>
+            </a:r>
+            <a:endParaRPr lang="ja-JP" sz="1100" dirty="0"/>
+          </a:p>
+          <a:p>
+            <a:pPr algn="ctr" indent="0" marL="0">
+              <a:buNone/>
+            </a:pPr>
+            <a:r>
+              <a:rPr lang="ja-JP" altLang="en-US" sz="1100" b="1" dirty="0">
+                <a:solidFill>
+                  <a:srgbClr val="FFFFFF"/>
+                </a:solidFill>
+                <a:latin typeface="メイリオ" pitchFamily="34" charset="0"/>
+                <a:ea typeface="メイリオ" pitchFamily="34" charset="-122"/>
+                <a:cs typeface="メイリオ" pitchFamily="34" charset="-120"/>
+              </a:rPr>
+              <a:t>用量</a:t>
             </a:r>
             <a:endParaRPr lang="ja-JP" sz="1100" dirty="0"/>
           </a:p>
@@ -10895,7 +11104,24 @@
                 <a:ea typeface="メイリオ" pitchFamily="34" charset="-122"/>
                 <a:cs typeface="メイリオ" pitchFamily="34" charset="-120"/>
               </a:rPr>
-              <a:t>最大用量</a:t>
+              <a:t>最大</a:t>
+            </a:r>
+            <a:endParaRPr lang="ja-JP" sz="1100" dirty="0"/>
+          </a:p>
+          <a:p>
+            <a:pPr algn="ctr" indent="0" marL="0">
+              <a:buNone/>
+            </a:pPr>
+            <a:r>
+              <a:rPr lang="ja-JP" altLang="en-US" sz="1100" dirty="0">
+                <a:solidFill>
+                  <a:srgbClr val="404040"/>
+                </a:solidFill>
+                <a:latin typeface="メイリオ" pitchFamily="34" charset="0"/>
+                <a:ea typeface="メイリオ" pitchFamily="34" charset="-122"/>
+                <a:cs typeface="メイリオ" pitchFamily="34" charset="-120"/>
+              </a:rPr>
+              <a:t>用量</a:t>
             </a:r>
             <a:endParaRPr lang="ja-JP" sz="1100" dirty="0"/>
           </a:p>
@@ -11095,8 +11321,8 @@
         </p:nvSpPr>
         <p:spPr>
           <a:xfrm>
-            <a:off x="6537960" y="1828800"/>
-            <a:ext cx="5010912" cy="457200"/>
+            <a:off x="6583680" y="1828800"/>
+            <a:ext cx="4919472" cy="457200"/>
           </a:xfrm>
           <a:prstGeom prst="rect">
             <a:avLst/>
@@ -11134,8 +11360,8 @@
         </p:nvSpPr>
         <p:spPr>
           <a:xfrm>
-            <a:off x="6537960" y="2359152"/>
-            <a:ext cx="5010912" cy="1307592"/>
+            <a:off x="6583680" y="2350008"/>
+            <a:ext cx="4919472" cy="420624"/>
           </a:xfrm>
           <a:prstGeom prst="rect">
             <a:avLst/>
@@ -11148,9 +11374,6 @@
           <a:lstStyle/>
           <a:p>
             <a:pPr algn="l" indent="0" marL="0">
-              <a:spcAft>
-                <a:spcPts val="200"/>
-              </a:spcAft>
               <a:buNone/>
             </a:pPr>
             <a:r>
@@ -11166,11 +11389,30 @@
             </a:r>
             <a:endParaRPr lang="ja-JP" sz="2200" dirty="0"/>
           </a:p>
+        </p:txBody>
+      </p:sp>
+      <p:sp>
+        <p:nvSpPr>
+          <p:cNvPr id="14" name="Text 12"/>
+          <p:cNvSpPr txBox="1"/>
+          <p:nvPr/>
+        </p:nvSpPr>
+        <p:spPr>
+          <a:xfrm>
+            <a:off x="6583680" y="2798064"/>
+            <a:ext cx="4919472" cy="420624"/>
+          </a:xfrm>
+          <a:prstGeom prst="rect">
+            <a:avLst/>
+          </a:prstGeom>
+          <a:noFill/>
+          <a:ln/>
+        </p:spPr>
+        <p:txBody>
+          <a:bodyPr wrap="square" lIns="0" tIns="0" rIns="0" bIns="0" rtlCol="0" anchor="t"/>
+          <a:lstStyle/>
           <a:p>
             <a:pPr algn="l" indent="0" marL="0">
-              <a:spcAft>
-                <a:spcPts val="200"/>
-              </a:spcAft>
               <a:buNone/>
             </a:pPr>
             <a:r>
@@ -11186,11 +11428,30 @@
             </a:r>
             <a:endParaRPr lang="ja-JP" sz="2200" dirty="0"/>
           </a:p>
+        </p:txBody>
+      </p:sp>
+      <p:sp>
+        <p:nvSpPr>
+          <p:cNvPr id="15" name="Text 13"/>
+          <p:cNvSpPr txBox="1"/>
+          <p:nvPr/>
+        </p:nvSpPr>
+        <p:spPr>
+          <a:xfrm>
+            <a:off x="6583680" y="3246120"/>
+            <a:ext cx="4919472" cy="420624"/>
+          </a:xfrm>
+          <a:prstGeom prst="rect">
+            <a:avLst/>
+          </a:prstGeom>
+          <a:noFill/>
+          <a:ln/>
+        </p:spPr>
+        <p:txBody>
+          <a:bodyPr wrap="square" lIns="0" tIns="0" rIns="0" bIns="0" rtlCol="0" anchor="t"/>
+          <a:lstStyle/>
           <a:p>
             <a:pPr algn="l" indent="0" marL="0">
-              <a:spcAft>
-                <a:spcPts val="200"/>
-              </a:spcAft>
               <a:buNone/>
             </a:pPr>
             <a:r>
@@ -11221,7 +11482,7 @@
       </p:sp>
       <p:sp>
         <p:nvSpPr>
-          <p:cNvPr id="14" name="Shape 12"/>
+          <p:cNvPr id="16" name="Shape 14"/>
           <p:cNvSpPr/>
           <p:nvPr/>
         </p:nvSpPr>
@@ -11243,14 +11504,14 @@
       </p:sp>
       <p:sp>
         <p:nvSpPr>
-          <p:cNvPr id="15" name="Text 13"/>
+          <p:cNvPr id="17" name="Text 15"/>
           <p:cNvSpPr txBox="1"/>
           <p:nvPr/>
         </p:nvSpPr>
         <p:spPr>
           <a:xfrm>
-            <a:off x="6537960" y="4178808"/>
-            <a:ext cx="5010912" cy="457200"/>
+            <a:off x="6583680" y="4178808"/>
+            <a:ext cx="4919472" cy="457200"/>
           </a:xfrm>
           <a:prstGeom prst="rect">
             <a:avLst/>
@@ -11282,14 +11543,14 @@
       </p:sp>
       <p:sp>
         <p:nvSpPr>
-          <p:cNvPr id="16" name="Text 14"/>
+          <p:cNvPr id="18" name="Text 16"/>
           <p:cNvSpPr txBox="1"/>
           <p:nvPr/>
         </p:nvSpPr>
         <p:spPr>
           <a:xfrm>
-            <a:off x="6537960" y="4709160"/>
-            <a:ext cx="5010912" cy="1307592"/>
+            <a:off x="6583680" y="4700016"/>
+            <a:ext cx="4919472" cy="420624"/>
           </a:xfrm>
           <a:prstGeom prst="rect">
             <a:avLst/>
@@ -11302,9 +11563,6 @@
           <a:lstStyle/>
           <a:p>
             <a:pPr algn="l" indent="0" marL="0">
-              <a:spcAft>
-                <a:spcPts val="200"/>
-              </a:spcAft>
               <a:buNone/>
             </a:pPr>
             <a:r>
@@ -11320,80 +11578,18 @@
             </a:r>
             <a:endParaRPr lang="ja-JP" sz="2200" dirty="0"/>
           </a:p>
-          <a:p>
-            <a:pPr algn="l" indent="0" marL="0">
-              <a:spcAft>
-                <a:spcPts val="200"/>
-              </a:spcAft>
-              <a:buNone/>
-            </a:pPr>
-            <a:r>
-              <a:rPr lang="ja-JP" altLang="en-US" sz="2200" dirty="0">
-                <a:solidFill>
-                  <a:srgbClr val="262626"/>
-                </a:solidFill>
-                <a:latin typeface="メイリオ" pitchFamily="34" charset="0"/>
-                <a:ea typeface="メイリオ" pitchFamily="34" charset="-122"/>
-                <a:cs typeface="メイリオ" pitchFamily="34" charset="-120"/>
-              </a:rPr>
-              <a:t>添付文書 200 mg → </a:t>
-            </a:r>
-            <a:r>
-              <a:rPr lang="ja-JP" altLang="en-US" sz="2200" b="1" dirty="0">
-                <a:solidFill>
-                  <a:srgbClr val="262626"/>
-                </a:solidFill>
-                <a:latin typeface="メイリオ" pitchFamily="34" charset="0"/>
-                <a:ea typeface="メイリオ" pitchFamily="34" charset="-122"/>
-                <a:cs typeface="メイリオ" pitchFamily="34" charset="-120"/>
-              </a:rPr>
-              <a:t>低い方 150 mg</a:t>
-            </a:r>
-            <a:endParaRPr lang="ja-JP" sz="2200" dirty="0"/>
-          </a:p>
-          <a:p>
-            <a:pPr algn="l" indent="0" marL="0">
-              <a:spcAft>
-                <a:spcPts val="200"/>
-              </a:spcAft>
-              <a:buNone/>
-            </a:pPr>
-            <a:r>
-              <a:rPr lang="ja-JP" altLang="en-US" sz="2200" dirty="0">
-                <a:solidFill>
-                  <a:srgbClr val="262626"/>
-                </a:solidFill>
-                <a:latin typeface="メイリオ" pitchFamily="34" charset="0"/>
-                <a:ea typeface="メイリオ" pitchFamily="34" charset="-122"/>
-                <a:cs typeface="メイリオ" pitchFamily="34" charset="-120"/>
-              </a:rPr>
-              <a:t>1% = 10 mg/mL → </a:t>
-            </a:r>
-            <a:r>
-              <a:rPr lang="ja-JP" altLang="en-US" sz="2200" b="1" dirty="0">
-                <a:solidFill>
-                  <a:srgbClr val="D55E00"/>
-                </a:solidFill>
-                <a:latin typeface="メイリオ" pitchFamily="34" charset="0"/>
-                <a:ea typeface="メイリオ" pitchFamily="34" charset="-122"/>
-                <a:cs typeface="メイリオ" pitchFamily="34" charset="-120"/>
-              </a:rPr>
-              <a:t>15 mL</a:t>
-            </a:r>
-            <a:endParaRPr lang="ja-JP" sz="2200" dirty="0"/>
-          </a:p>
-        </p:txBody>
-      </p:sp>
-      <p:sp>
-        <p:nvSpPr>
-          <p:cNvPr id="17" name="Text 15"/>
+        </p:txBody>
+      </p:sp>
+      <p:sp>
+        <p:nvSpPr>
+          <p:cNvPr id="19" name="Text 17"/>
           <p:cNvSpPr txBox="1"/>
           <p:nvPr/>
         </p:nvSpPr>
         <p:spPr>
           <a:xfrm>
-            <a:off x="502920" y="2514600"/>
-            <a:ext cx="5532120" cy="539496"/>
+            <a:off x="6583680" y="5148072"/>
+            <a:ext cx="4919472" cy="420624"/>
           </a:xfrm>
           <a:prstGeom prst="rect">
             <a:avLst/>
@@ -11405,11 +11601,111 @@
           <a:bodyPr wrap="square" lIns="0" tIns="0" rIns="0" bIns="0" rtlCol="0" anchor="t"/>
           <a:lstStyle/>
           <a:p>
+            <a:pPr algn="l" indent="0" marL="0">
+              <a:buNone/>
+            </a:pPr>
+            <a:r>
+              <a:rPr lang="ja-JP" altLang="en-US" sz="2200" dirty="0">
+                <a:solidFill>
+                  <a:srgbClr val="262626"/>
+                </a:solidFill>
+                <a:latin typeface="メイリオ" pitchFamily="34" charset="0"/>
+                <a:ea typeface="メイリオ" pitchFamily="34" charset="-122"/>
+                <a:cs typeface="メイリオ" pitchFamily="34" charset="-120"/>
+              </a:rPr>
+              <a:t>添付文書 200 mg → </a:t>
+            </a:r>
+            <a:r>
+              <a:rPr lang="ja-JP" altLang="en-US" sz="2200" b="1" dirty="0">
+                <a:solidFill>
+                  <a:srgbClr val="262626"/>
+                </a:solidFill>
+                <a:latin typeface="メイリオ" pitchFamily="34" charset="0"/>
+                <a:ea typeface="メイリオ" pitchFamily="34" charset="-122"/>
+                <a:cs typeface="メイリオ" pitchFamily="34" charset="-120"/>
+              </a:rPr>
+              <a:t>低い方 150 mg</a:t>
+            </a:r>
+            <a:endParaRPr lang="ja-JP" sz="2200" dirty="0"/>
+          </a:p>
+        </p:txBody>
+      </p:sp>
+      <p:sp>
+        <p:nvSpPr>
+          <p:cNvPr id="20" name="Text 18"/>
+          <p:cNvSpPr txBox="1"/>
+          <p:nvPr/>
+        </p:nvSpPr>
+        <p:spPr>
+          <a:xfrm>
+            <a:off x="6583680" y="5596128"/>
+            <a:ext cx="4919472" cy="420624"/>
+          </a:xfrm>
+          <a:prstGeom prst="rect">
+            <a:avLst/>
+          </a:prstGeom>
+          <a:noFill/>
+          <a:ln/>
+        </p:spPr>
+        <p:txBody>
+          <a:bodyPr wrap="square" lIns="0" tIns="0" rIns="0" bIns="0" rtlCol="0" anchor="t"/>
+          <a:lstStyle/>
+          <a:p>
+            <a:pPr algn="l" indent="0" marL="0">
+              <a:buNone/>
+            </a:pPr>
+            <a:r>
+              <a:rPr lang="ja-JP" altLang="en-US" sz="2200" dirty="0">
+                <a:solidFill>
+                  <a:srgbClr val="262626"/>
+                </a:solidFill>
+                <a:latin typeface="メイリオ" pitchFamily="34" charset="0"/>
+                <a:ea typeface="メイリオ" pitchFamily="34" charset="-122"/>
+                <a:cs typeface="メイリオ" pitchFamily="34" charset="-120"/>
+              </a:rPr>
+              <a:t>1% = 10 mg/mL → </a:t>
+            </a:r>
+            <a:r>
+              <a:rPr lang="ja-JP" altLang="en-US" sz="2200" b="1" dirty="0">
+                <a:solidFill>
+                  <a:srgbClr val="D55E00"/>
+                </a:solidFill>
+                <a:latin typeface="メイリオ" pitchFamily="34" charset="0"/>
+                <a:ea typeface="メイリオ" pitchFamily="34" charset="-122"/>
+                <a:cs typeface="メイリオ" pitchFamily="34" charset="-120"/>
+              </a:rPr>
+              <a:t>15 mL</a:t>
+            </a:r>
+            <a:endParaRPr lang="ja-JP" sz="2200" dirty="0"/>
+          </a:p>
+        </p:txBody>
+      </p:sp>
+      <p:sp>
+        <p:nvSpPr>
+          <p:cNvPr id="21" name="Text 19"/>
+          <p:cNvSpPr txBox="1"/>
+          <p:nvPr/>
+        </p:nvSpPr>
+        <p:spPr>
+          <a:xfrm>
+            <a:off x="502920" y="2532888"/>
+            <a:ext cx="5532120" cy="502920"/>
+          </a:xfrm>
+          <a:prstGeom prst="rect">
+            <a:avLst/>
+          </a:prstGeom>
+          <a:noFill/>
+          <a:ln/>
+        </p:spPr>
+        <p:txBody>
+          <a:bodyPr wrap="square" lIns="0" tIns="0" rIns="0" bIns="0" rtlCol="0" anchor="t"/>
+          <a:lstStyle/>
+          <a:p>
             <a:pPr algn="ctr" indent="0" marL="0">
               <a:buNone/>
             </a:pPr>
             <a:r>
-              <a:rPr lang="ja-JP" altLang="en-US" sz="2800" b="1" dirty="0">
+              <a:rPr lang="ja-JP" altLang="en-US" sz="2600" b="1" dirty="0">
                 <a:solidFill>
                   <a:srgbClr val="262626"/>
                 </a:solidFill>
@@ -11420,7 +11716,7 @@
               <a:t>X % = </a:t>
             </a:r>
             <a:r>
-              <a:rPr lang="ja-JP" altLang="en-US" sz="2800" b="1" dirty="0">
+              <a:rPr lang="ja-JP" altLang="en-US" sz="2600" b="1" dirty="0">
                 <a:solidFill>
                   <a:srgbClr val="0072B2"/>
                 </a:solidFill>
@@ -11430,20 +11726,20 @@
               </a:rPr>
               <a:t>X × 10 mg/mL</a:t>
             </a:r>
-            <a:endParaRPr lang="ja-JP" sz="2800" dirty="0"/>
-          </a:p>
-        </p:txBody>
-      </p:sp>
-      <p:sp>
-        <p:nvSpPr>
-          <p:cNvPr id="18" name="Shape 16"/>
+            <a:endParaRPr lang="ja-JP" sz="2600" dirty="0"/>
+          </a:p>
+        </p:txBody>
+      </p:sp>
+      <p:sp>
+        <p:nvSpPr>
+          <p:cNvPr id="22" name="Shape 20"/>
           <p:cNvSpPr/>
           <p:nvPr/>
         </p:nvSpPr>
         <p:spPr>
           <a:xfrm>
-            <a:off x="3268980" y="3291840"/>
-            <a:ext cx="0" cy="1088136"/>
+            <a:off x="3268980" y="3273552"/>
+            <a:ext cx="0" cy="1124712"/>
           </a:xfrm>
           <a:prstGeom prst="line">
             <a:avLst/>
@@ -11459,13 +11755,13 @@
       </p:sp>
       <p:sp>
         <p:nvSpPr>
-          <p:cNvPr id="19" name="Shape 17"/>
+          <p:cNvPr id="23" name="Shape 21"/>
           <p:cNvSpPr/>
           <p:nvPr/>
         </p:nvSpPr>
         <p:spPr>
           <a:xfrm>
-            <a:off x="3150108" y="4361688"/>
+            <a:off x="3150108" y="4379976"/>
             <a:ext cx="237744" cy="201168"/>
           </a:xfrm>
           <a:custGeom>
@@ -11502,14 +11798,14 @@
       </p:sp>
       <p:sp>
         <p:nvSpPr>
-          <p:cNvPr id="20" name="Text 18"/>
+          <p:cNvPr id="24" name="Text 22"/>
           <p:cNvSpPr txBox="1"/>
           <p:nvPr/>
         </p:nvSpPr>
         <p:spPr>
           <a:xfrm>
-            <a:off x="502920" y="4800600"/>
-            <a:ext cx="5532120" cy="539496"/>
+            <a:off x="502920" y="4818888"/>
+            <a:ext cx="5532120" cy="502920"/>
           </a:xfrm>
           <a:prstGeom prst="rect">
             <a:avLst/>
@@ -11525,7 +11821,7 @@
               <a:buNone/>
             </a:pPr>
             <a:r>
-              <a:rPr lang="ja-JP" altLang="en-US" sz="2800" b="1" dirty="0">
+              <a:rPr lang="ja-JP" altLang="en-US" sz="2600" b="1" dirty="0">
                 <a:solidFill>
                   <a:srgbClr val="262626"/>
                 </a:solidFill>
@@ -11535,7 +11831,7 @@
               </a:rPr>
               <a:t>mL = 上限(mg) ÷ 濃度(mg/mL)</a:t>
             </a:r>
-            <a:endParaRPr lang="ja-JP" sz="2800" dirty="0"/>
+            <a:endParaRPr lang="ja-JP" sz="2600" dirty="0"/>
           </a:p>
         </p:txBody>
       </p:sp>
@@ -11758,7 +12054,24 @@
                 <a:ea typeface="メイリオ" pitchFamily="34" charset="-122"/>
                 <a:cs typeface="メイリオ" pitchFamily="34" charset="-120"/>
               </a:rPr>
-              <a:t>最大用量</a:t>
+              <a:t>最大</a:t>
+            </a:r>
+            <a:endParaRPr lang="ja-JP" sz="1100" dirty="0"/>
+          </a:p>
+          <a:p>
+            <a:pPr algn="ctr" indent="0" marL="0">
+              <a:buNone/>
+            </a:pPr>
+            <a:r>
+              <a:rPr lang="ja-JP" altLang="en-US" sz="1100" dirty="0">
+                <a:solidFill>
+                  <a:srgbClr val="404040"/>
+                </a:solidFill>
+                <a:latin typeface="メイリオ" pitchFamily="34" charset="0"/>
+                <a:ea typeface="メイリオ" pitchFamily="34" charset="-122"/>
+                <a:cs typeface="メイリオ" pitchFamily="34" charset="-120"/>
+              </a:rPr>
+              <a:t>用量</a:t>
             </a:r>
             <a:endParaRPr lang="ja-JP" sz="1100" dirty="0"/>
           </a:p>
@@ -13047,7 +13360,24 @@
                 <a:ea typeface="メイリオ" pitchFamily="34" charset="-122"/>
                 <a:cs typeface="メイリオ" pitchFamily="34" charset="-120"/>
               </a:rPr>
-              <a:t>最大用量</a:t>
+              <a:t>最大</a:t>
+            </a:r>
+            <a:endParaRPr lang="ja-JP" sz="1100" dirty="0"/>
+          </a:p>
+          <a:p>
+            <a:pPr algn="ctr" indent="0" marL="0">
+              <a:buNone/>
+            </a:pPr>
+            <a:r>
+              <a:rPr lang="ja-JP" altLang="en-US" sz="1100" dirty="0">
+                <a:solidFill>
+                  <a:srgbClr val="404040"/>
+                </a:solidFill>
+                <a:latin typeface="メイリオ" pitchFamily="34" charset="0"/>
+                <a:ea typeface="メイリオ" pitchFamily="34" charset="-122"/>
+                <a:cs typeface="メイリオ" pitchFamily="34" charset="-120"/>
+              </a:rPr>
+              <a:t>用量</a:t>
             </a:r>
             <a:endParaRPr lang="ja-JP" sz="1100" dirty="0"/>
           </a:p>

--- a/slides/3-11_local_anesthetics/3-11_local_anesthetics.pptx
+++ b/slides/3-11_local_anesthetics/3-11_local_anesthetics.pptx
@@ -2314,7 +2314,7 @@
           <a:ln/>
         </p:spPr>
         <p:txBody>
-          <a:bodyPr wrap="square" lIns="0" tIns="0" rIns="0" bIns="0" rtlCol="0" anchor="ctr"/>
+          <a:bodyPr wrap="none" lIns="0" tIns="0" rIns="0" bIns="0" rtlCol="0" anchor="ctr"/>
           <a:lstStyle/>
           <a:p>
             <a:pPr algn="ctr" indent="0" marL="0">
@@ -2357,7 +2357,7 @@
           <a:ln/>
         </p:spPr>
         <p:txBody>
-          <a:bodyPr wrap="square" lIns="0" tIns="0" rIns="0" bIns="0" rtlCol="0" anchor="ctr"/>
+          <a:bodyPr wrap="none" lIns="0" tIns="0" rIns="0" bIns="0" rtlCol="0" anchor="ctr"/>
           <a:lstStyle/>
           <a:p>
             <a:pPr algn="ctr" indent="0" marL="0">
@@ -2400,7 +2400,7 @@
           <a:ln/>
         </p:spPr>
         <p:txBody>
-          <a:bodyPr wrap="square" lIns="0" tIns="0" rIns="0" bIns="0" rtlCol="0" anchor="ctr"/>
+          <a:bodyPr wrap="none" lIns="0" tIns="0" rIns="0" bIns="0" rtlCol="0" anchor="ctr"/>
           <a:lstStyle/>
           <a:p>
             <a:pPr algn="ctr" indent="0" marL="0">
@@ -2460,7 +2460,7 @@
           <a:ln/>
         </p:spPr>
         <p:txBody>
-          <a:bodyPr wrap="square" lIns="0" tIns="0" rIns="0" bIns="0" rtlCol="0" anchor="ctr"/>
+          <a:bodyPr wrap="none" lIns="0" tIns="0" rIns="0" bIns="0" rtlCol="0" anchor="ctr"/>
           <a:lstStyle/>
           <a:p>
             <a:pPr algn="ctr" indent="0" marL="0">
@@ -2503,7 +2503,7 @@
           <a:ln/>
         </p:spPr>
         <p:txBody>
-          <a:bodyPr wrap="square" lIns="0" tIns="0" rIns="0" bIns="0" rtlCol="0" anchor="ctr"/>
+          <a:bodyPr wrap="none" lIns="0" tIns="0" rIns="0" bIns="0" rtlCol="0" anchor="ctr"/>
           <a:lstStyle/>
           <a:p>
             <a:pPr algn="ctr" indent="0" marL="0">
@@ -2902,7 +2902,7 @@
           <a:ln/>
         </p:spPr>
         <p:txBody>
-          <a:bodyPr wrap="square" lIns="0" tIns="0" rIns="0" bIns="0" rtlCol="0" anchor="ctr"/>
+          <a:bodyPr wrap="none" lIns="0" tIns="0" rIns="0" bIns="0" rtlCol="0" anchor="ctr"/>
           <a:lstStyle/>
           <a:p>
             <a:pPr algn="ctr" indent="0" marL="0">
@@ -2945,7 +2945,7 @@
           <a:ln/>
         </p:spPr>
         <p:txBody>
-          <a:bodyPr wrap="square" lIns="0" tIns="0" rIns="0" bIns="0" rtlCol="0" anchor="ctr"/>
+          <a:bodyPr wrap="none" lIns="0" tIns="0" rIns="0" bIns="0" rtlCol="0" anchor="ctr"/>
           <a:lstStyle/>
           <a:p>
             <a:pPr algn="ctr" indent="0" marL="0">
@@ -2988,7 +2988,7 @@
           <a:ln/>
         </p:spPr>
         <p:txBody>
-          <a:bodyPr wrap="square" lIns="0" tIns="0" rIns="0" bIns="0" rtlCol="0" anchor="ctr"/>
+          <a:bodyPr wrap="none" lIns="0" tIns="0" rIns="0" bIns="0" rtlCol="0" anchor="ctr"/>
           <a:lstStyle/>
           <a:p>
             <a:pPr algn="ctr" indent="0" marL="0">
@@ -3048,7 +3048,7 @@
           <a:ln/>
         </p:spPr>
         <p:txBody>
-          <a:bodyPr wrap="square" lIns="0" tIns="0" rIns="0" bIns="0" rtlCol="0" anchor="ctr"/>
+          <a:bodyPr wrap="none" lIns="0" tIns="0" rIns="0" bIns="0" rtlCol="0" anchor="ctr"/>
           <a:lstStyle/>
           <a:p>
             <a:pPr algn="ctr" indent="0" marL="0">
@@ -3091,7 +3091,7 @@
           <a:ln/>
         </p:spPr>
         <p:txBody>
-          <a:bodyPr wrap="square" lIns="0" tIns="0" rIns="0" bIns="0" rtlCol="0" anchor="ctr"/>
+          <a:bodyPr wrap="none" lIns="0" tIns="0" rIns="0" bIns="0" rtlCol="0" anchor="ctr"/>
           <a:lstStyle/>
           <a:p>
             <a:pPr algn="ctr" indent="0" marL="0">
@@ -4178,7 +4178,7 @@
           <a:ln/>
         </p:spPr>
         <p:txBody>
-          <a:bodyPr wrap="square" lIns="0" tIns="0" rIns="0" bIns="0" rtlCol="0" anchor="ctr"/>
+          <a:bodyPr wrap="none" lIns="0" tIns="0" rIns="0" bIns="0" rtlCol="0" anchor="ctr"/>
           <a:lstStyle/>
           <a:p>
             <a:pPr algn="ctr" indent="0" marL="0">
@@ -4221,7 +4221,7 @@
           <a:ln/>
         </p:spPr>
         <p:txBody>
-          <a:bodyPr wrap="square" lIns="0" tIns="0" rIns="0" bIns="0" rtlCol="0" anchor="ctr"/>
+          <a:bodyPr wrap="none" lIns="0" tIns="0" rIns="0" bIns="0" rtlCol="0" anchor="ctr"/>
           <a:lstStyle/>
           <a:p>
             <a:pPr algn="ctr" indent="0" marL="0">
@@ -4264,7 +4264,7 @@
           <a:ln/>
         </p:spPr>
         <p:txBody>
-          <a:bodyPr wrap="square" lIns="0" tIns="0" rIns="0" bIns="0" rtlCol="0" anchor="ctr"/>
+          <a:bodyPr wrap="none" lIns="0" tIns="0" rIns="0" bIns="0" rtlCol="0" anchor="ctr"/>
           <a:lstStyle/>
           <a:p>
             <a:pPr algn="ctr" indent="0" marL="0">
@@ -4324,7 +4324,7 @@
           <a:ln/>
         </p:spPr>
         <p:txBody>
-          <a:bodyPr wrap="square" lIns="0" tIns="0" rIns="0" bIns="0" rtlCol="0" anchor="ctr"/>
+          <a:bodyPr wrap="none" lIns="0" tIns="0" rIns="0" bIns="0" rtlCol="0" anchor="ctr"/>
           <a:lstStyle/>
           <a:p>
             <a:pPr algn="ctr" indent="0" marL="0">
@@ -4367,7 +4367,7 @@
           <a:ln/>
         </p:spPr>
         <p:txBody>
-          <a:bodyPr wrap="square" lIns="0" tIns="0" rIns="0" bIns="0" rtlCol="0" anchor="ctr"/>
+          <a:bodyPr wrap="none" lIns="0" tIns="0" rIns="0" bIns="0" rtlCol="0" anchor="ctr"/>
           <a:lstStyle/>
           <a:p>
             <a:pPr algn="ctr" indent="0" marL="0">
@@ -5167,7 +5167,7 @@
           <a:ln/>
         </p:spPr>
         <p:txBody>
-          <a:bodyPr wrap="square" lIns="0" tIns="0" rIns="0" bIns="0" rtlCol="0" anchor="ctr"/>
+          <a:bodyPr wrap="none" lIns="0" tIns="0" rIns="0" bIns="0" rtlCol="0" anchor="ctr"/>
           <a:lstStyle/>
           <a:p>
             <a:pPr algn="ctr" indent="0" marL="0">
@@ -5210,7 +5210,7 @@
           <a:ln/>
         </p:spPr>
         <p:txBody>
-          <a:bodyPr wrap="square" lIns="0" tIns="0" rIns="0" bIns="0" rtlCol="0" anchor="ctr"/>
+          <a:bodyPr wrap="none" lIns="0" tIns="0" rIns="0" bIns="0" rtlCol="0" anchor="ctr"/>
           <a:lstStyle/>
           <a:p>
             <a:pPr algn="ctr" indent="0" marL="0">
@@ -5253,7 +5253,7 @@
           <a:ln/>
         </p:spPr>
         <p:txBody>
-          <a:bodyPr wrap="square" lIns="0" tIns="0" rIns="0" bIns="0" rtlCol="0" anchor="ctr"/>
+          <a:bodyPr wrap="none" lIns="0" tIns="0" rIns="0" bIns="0" rtlCol="0" anchor="ctr"/>
           <a:lstStyle/>
           <a:p>
             <a:pPr algn="ctr" indent="0" marL="0">
@@ -5313,7 +5313,7 @@
           <a:ln/>
         </p:spPr>
         <p:txBody>
-          <a:bodyPr wrap="square" lIns="0" tIns="0" rIns="0" bIns="0" rtlCol="0" anchor="ctr"/>
+          <a:bodyPr wrap="none" lIns="0" tIns="0" rIns="0" bIns="0" rtlCol="0" anchor="ctr"/>
           <a:lstStyle/>
           <a:p>
             <a:pPr algn="ctr" indent="0" marL="0">
@@ -5356,7 +5356,7 @@
           <a:ln/>
         </p:spPr>
         <p:txBody>
-          <a:bodyPr wrap="square" lIns="0" tIns="0" rIns="0" bIns="0" rtlCol="0" anchor="ctr"/>
+          <a:bodyPr wrap="none" lIns="0" tIns="0" rIns="0" bIns="0" rtlCol="0" anchor="ctr"/>
           <a:lstStyle/>
           <a:p>
             <a:pPr algn="ctr" indent="0" marL="0">
@@ -7470,7 +7470,7 @@
           <a:ln/>
         </p:spPr>
         <p:txBody>
-          <a:bodyPr wrap="square" lIns="0" tIns="0" rIns="0" bIns="0" rtlCol="0" anchor="ctr"/>
+          <a:bodyPr wrap="none" lIns="0" tIns="0" rIns="0" bIns="0" rtlCol="0" anchor="ctr"/>
           <a:lstStyle/>
           <a:p>
             <a:pPr algn="ctr" indent="0" marL="0">
@@ -7513,7 +7513,7 @@
           <a:ln/>
         </p:spPr>
         <p:txBody>
-          <a:bodyPr wrap="square" lIns="0" tIns="0" rIns="0" bIns="0" rtlCol="0" anchor="ctr"/>
+          <a:bodyPr wrap="none" lIns="0" tIns="0" rIns="0" bIns="0" rtlCol="0" anchor="ctr"/>
           <a:lstStyle/>
           <a:p>
             <a:pPr algn="ctr" indent="0" marL="0">
@@ -7556,7 +7556,7 @@
           <a:ln/>
         </p:spPr>
         <p:txBody>
-          <a:bodyPr wrap="square" lIns="0" tIns="0" rIns="0" bIns="0" rtlCol="0" anchor="ctr"/>
+          <a:bodyPr wrap="none" lIns="0" tIns="0" rIns="0" bIns="0" rtlCol="0" anchor="ctr"/>
           <a:lstStyle/>
           <a:p>
             <a:pPr algn="ctr" indent="0" marL="0">
@@ -7616,7 +7616,7 @@
           <a:ln/>
         </p:spPr>
         <p:txBody>
-          <a:bodyPr wrap="square" lIns="0" tIns="0" rIns="0" bIns="0" rtlCol="0" anchor="ctr"/>
+          <a:bodyPr wrap="none" lIns="0" tIns="0" rIns="0" bIns="0" rtlCol="0" anchor="ctr"/>
           <a:lstStyle/>
           <a:p>
             <a:pPr algn="ctr" indent="0" marL="0">
@@ -7659,7 +7659,7 @@
           <a:ln/>
         </p:spPr>
         <p:txBody>
-          <a:bodyPr wrap="square" lIns="0" tIns="0" rIns="0" bIns="0" rtlCol="0" anchor="ctr"/>
+          <a:bodyPr wrap="none" lIns="0" tIns="0" rIns="0" bIns="0" rtlCol="0" anchor="ctr"/>
           <a:lstStyle/>
           <a:p>
             <a:pPr algn="ctr" indent="0" marL="0">
@@ -9289,7 +9289,7 @@
           <a:ln/>
         </p:spPr>
         <p:txBody>
-          <a:bodyPr wrap="square" lIns="0" tIns="0" rIns="0" bIns="0" rtlCol="0" anchor="ctr"/>
+          <a:bodyPr wrap="none" lIns="0" tIns="0" rIns="0" bIns="0" rtlCol="0" anchor="ctr"/>
           <a:lstStyle/>
           <a:p>
             <a:pPr algn="ctr" indent="0" marL="0">
@@ -9332,7 +9332,7 @@
           <a:ln/>
         </p:spPr>
         <p:txBody>
-          <a:bodyPr wrap="square" lIns="0" tIns="0" rIns="0" bIns="0" rtlCol="0" anchor="ctr"/>
+          <a:bodyPr wrap="none" lIns="0" tIns="0" rIns="0" bIns="0" rtlCol="0" anchor="ctr"/>
           <a:lstStyle/>
           <a:p>
             <a:pPr algn="ctr" indent="0" marL="0">
@@ -9375,7 +9375,7 @@
           <a:ln/>
         </p:spPr>
         <p:txBody>
-          <a:bodyPr wrap="square" lIns="0" tIns="0" rIns="0" bIns="0" rtlCol="0" anchor="ctr"/>
+          <a:bodyPr wrap="none" lIns="0" tIns="0" rIns="0" bIns="0" rtlCol="0" anchor="ctr"/>
           <a:lstStyle/>
           <a:p>
             <a:pPr algn="ctr" indent="0" marL="0">
@@ -9435,7 +9435,7 @@
           <a:ln/>
         </p:spPr>
         <p:txBody>
-          <a:bodyPr wrap="square" lIns="0" tIns="0" rIns="0" bIns="0" rtlCol="0" anchor="ctr"/>
+          <a:bodyPr wrap="none" lIns="0" tIns="0" rIns="0" bIns="0" rtlCol="0" anchor="ctr"/>
           <a:lstStyle/>
           <a:p>
             <a:pPr algn="ctr" indent="0" marL="0">
@@ -9478,7 +9478,7 @@
           <a:ln/>
         </p:spPr>
         <p:txBody>
-          <a:bodyPr wrap="square" lIns="0" tIns="0" rIns="0" bIns="0" rtlCol="0" anchor="ctr"/>
+          <a:bodyPr wrap="none" lIns="0" tIns="0" rIns="0" bIns="0" rtlCol="0" anchor="ctr"/>
           <a:lstStyle/>
           <a:p>
             <a:pPr algn="ctr" indent="0" marL="0">
@@ -11003,7 +11003,7 @@
           <a:ln/>
         </p:spPr>
         <p:txBody>
-          <a:bodyPr wrap="square" lIns="0" tIns="0" rIns="0" bIns="0" rtlCol="0" anchor="ctr"/>
+          <a:bodyPr wrap="none" lIns="0" tIns="0" rIns="0" bIns="0" rtlCol="0" anchor="ctr"/>
           <a:lstStyle/>
           <a:p>
             <a:pPr algn="ctr" indent="0" marL="0">
@@ -11046,7 +11046,7 @@
           <a:ln/>
         </p:spPr>
         <p:txBody>
-          <a:bodyPr wrap="square" lIns="0" tIns="0" rIns="0" bIns="0" rtlCol="0" anchor="ctr"/>
+          <a:bodyPr wrap="none" lIns="0" tIns="0" rIns="0" bIns="0" rtlCol="0" anchor="ctr"/>
           <a:lstStyle/>
           <a:p>
             <a:pPr algn="ctr" indent="0" marL="0">
@@ -11089,7 +11089,7 @@
           <a:ln/>
         </p:spPr>
         <p:txBody>
-          <a:bodyPr wrap="square" lIns="0" tIns="0" rIns="0" bIns="0" rtlCol="0" anchor="ctr"/>
+          <a:bodyPr wrap="none" lIns="0" tIns="0" rIns="0" bIns="0" rtlCol="0" anchor="ctr"/>
           <a:lstStyle/>
           <a:p>
             <a:pPr algn="ctr" indent="0" marL="0">
@@ -11149,7 +11149,7 @@
           <a:ln/>
         </p:spPr>
         <p:txBody>
-          <a:bodyPr wrap="square" lIns="0" tIns="0" rIns="0" bIns="0" rtlCol="0" anchor="ctr"/>
+          <a:bodyPr wrap="none" lIns="0" tIns="0" rIns="0" bIns="0" rtlCol="0" anchor="ctr"/>
           <a:lstStyle/>
           <a:p>
             <a:pPr algn="ctr" indent="0" marL="0">
@@ -11192,7 +11192,7 @@
           <a:ln/>
         </p:spPr>
         <p:txBody>
-          <a:bodyPr wrap="square" lIns="0" tIns="0" rIns="0" bIns="0" rtlCol="0" anchor="ctr"/>
+          <a:bodyPr wrap="none" lIns="0" tIns="0" rIns="0" bIns="0" rtlCol="0" anchor="ctr"/>
           <a:lstStyle/>
           <a:p>
             <a:pPr algn="ctr" indent="0" marL="0">
@@ -11953,7 +11953,7 @@
           <a:ln/>
         </p:spPr>
         <p:txBody>
-          <a:bodyPr wrap="square" lIns="0" tIns="0" rIns="0" bIns="0" rtlCol="0" anchor="ctr"/>
+          <a:bodyPr wrap="none" lIns="0" tIns="0" rIns="0" bIns="0" rtlCol="0" anchor="ctr"/>
           <a:lstStyle/>
           <a:p>
             <a:pPr algn="ctr" indent="0" marL="0">
@@ -11996,7 +11996,7 @@
           <a:ln/>
         </p:spPr>
         <p:txBody>
-          <a:bodyPr wrap="square" lIns="0" tIns="0" rIns="0" bIns="0" rtlCol="0" anchor="ctr"/>
+          <a:bodyPr wrap="none" lIns="0" tIns="0" rIns="0" bIns="0" rtlCol="0" anchor="ctr"/>
           <a:lstStyle/>
           <a:p>
             <a:pPr algn="ctr" indent="0" marL="0">
@@ -12039,7 +12039,7 @@
           <a:ln/>
         </p:spPr>
         <p:txBody>
-          <a:bodyPr wrap="square" lIns="0" tIns="0" rIns="0" bIns="0" rtlCol="0" anchor="ctr"/>
+          <a:bodyPr wrap="none" lIns="0" tIns="0" rIns="0" bIns="0" rtlCol="0" anchor="ctr"/>
           <a:lstStyle/>
           <a:p>
             <a:pPr algn="ctr" indent="0" marL="0">
@@ -12099,7 +12099,7 @@
           <a:ln/>
         </p:spPr>
         <p:txBody>
-          <a:bodyPr wrap="square" lIns="0" tIns="0" rIns="0" bIns="0" rtlCol="0" anchor="ctr"/>
+          <a:bodyPr wrap="none" lIns="0" tIns="0" rIns="0" bIns="0" rtlCol="0" anchor="ctr"/>
           <a:lstStyle/>
           <a:p>
             <a:pPr algn="ctr" indent="0" marL="0">
@@ -12142,7 +12142,7 @@
           <a:ln/>
         </p:spPr>
         <p:txBody>
-          <a:bodyPr wrap="square" lIns="0" tIns="0" rIns="0" bIns="0" rtlCol="0" anchor="ctr"/>
+          <a:bodyPr wrap="none" lIns="0" tIns="0" rIns="0" bIns="0" rtlCol="0" anchor="ctr"/>
           <a:lstStyle/>
           <a:p>
             <a:pPr algn="ctr" indent="0" marL="0">
@@ -13259,7 +13259,7 @@
           <a:ln/>
         </p:spPr>
         <p:txBody>
-          <a:bodyPr wrap="square" lIns="0" tIns="0" rIns="0" bIns="0" rtlCol="0" anchor="ctr"/>
+          <a:bodyPr wrap="none" lIns="0" tIns="0" rIns="0" bIns="0" rtlCol="0" anchor="ctr"/>
           <a:lstStyle/>
           <a:p>
             <a:pPr algn="ctr" indent="0" marL="0">
@@ -13302,7 +13302,7 @@
           <a:ln/>
         </p:spPr>
         <p:txBody>
-          <a:bodyPr wrap="square" lIns="0" tIns="0" rIns="0" bIns="0" rtlCol="0" anchor="ctr"/>
+          <a:bodyPr wrap="none" lIns="0" tIns="0" rIns="0" bIns="0" rtlCol="0" anchor="ctr"/>
           <a:lstStyle/>
           <a:p>
             <a:pPr algn="ctr" indent="0" marL="0">
@@ -13345,7 +13345,7 @@
           <a:ln/>
         </p:spPr>
         <p:txBody>
-          <a:bodyPr wrap="square" lIns="0" tIns="0" rIns="0" bIns="0" rtlCol="0" anchor="ctr"/>
+          <a:bodyPr wrap="none" lIns="0" tIns="0" rIns="0" bIns="0" rtlCol="0" anchor="ctr"/>
           <a:lstStyle/>
           <a:p>
             <a:pPr algn="ctr" indent="0" marL="0">
@@ -13405,7 +13405,7 @@
           <a:ln/>
         </p:spPr>
         <p:txBody>
-          <a:bodyPr wrap="square" lIns="0" tIns="0" rIns="0" bIns="0" rtlCol="0" anchor="ctr"/>
+          <a:bodyPr wrap="none" lIns="0" tIns="0" rIns="0" bIns="0" rtlCol="0" anchor="ctr"/>
           <a:lstStyle/>
           <a:p>
             <a:pPr algn="ctr" indent="0" marL="0">
@@ -13448,7 +13448,7 @@
           <a:ln/>
         </p:spPr>
         <p:txBody>
-          <a:bodyPr wrap="square" lIns="0" tIns="0" rIns="0" bIns="0" rtlCol="0" anchor="ctr"/>
+          <a:bodyPr wrap="none" lIns="0" tIns="0" rIns="0" bIns="0" rtlCol="0" anchor="ctr"/>
           <a:lstStyle/>
           <a:p>
             <a:pPr algn="ctr" indent="0" marL="0">
